--- a/ZEN_ZAIC_보고자료.pptx
+++ b/ZEN_ZAIC_보고자료.pptx
@@ -2831,7 +2831,7 @@
                 <a:ea typeface="Malgun Gothic" pitchFamily="34" charset="-122"/>
                 <a:cs typeface="Malgun Gothic" pitchFamily="34" charset="-120"/>
               </a:rPr>
-              <a:t>타 사업장 확산</a:t>
+              <a:t>결과 공유·확산 협조</a:t>
             </a:r>
             <a:endParaRPr lang="en-US" sz="1800" dirty="0"/>
           </a:p>
@@ -2870,7 +2870,7 @@
                 <a:ea typeface="Malgun Gothic" pitchFamily="34" charset="-122"/>
                 <a:cs typeface="Malgun Gothic" pitchFamily="34" charset="-120"/>
               </a:rPr>
-              <a:t>판단 룰이 코드로 이식되어 있어 — 신규 현장은 임계값 조정만으로 복제 가능</a:t>
+              <a:t>우수사례 선정 시 결과물·활용 사례 사내 공유 — 타 현장 도입 지원 (계획서 확약)</a:t>
             </a:r>
             <a:endParaRPr lang="en-US" sz="1250" dirty="0"/>
           </a:p>
@@ -9223,7 +9223,7 @@
                 <a:ea typeface="Malgun Gothic" pitchFamily="34" charset="-122"/>
                 <a:cs typeface="Malgun Gothic" pitchFamily="34" charset="-120"/>
               </a:rPr>
-              <a:t>숫자로 증명된 효과</a:t>
+              <a:t>SCALE · 확산 가능성</a:t>
             </a:r>
             <a:endParaRPr lang="en-US" sz="1500" dirty="0"/>
           </a:p>
@@ -9265,7 +9265,7 @@
                 <a:ea typeface="Malgun Gothic" pitchFamily="34" charset="-122"/>
                 <a:cs typeface="Malgun Gothic" pitchFamily="34" charset="-120"/>
               </a:rPr>
-              <a:t>수기 취합의 시대는 끝났습니다.</a:t>
+              <a:t>1곳에서 증명했습니다.</a:t>
             </a:r>
             <a:endParaRPr lang="en-US" sz="3400" dirty="0"/>
           </a:p>
@@ -9285,7 +9285,7 @@
                 <a:ea typeface="Malgun Gothic" pitchFamily="34" charset="-122"/>
                 <a:cs typeface="Malgun Gothic" pitchFamily="34" charset="-120"/>
               </a:rPr>
-              <a:t>이제 ‘판단’과 ‘조치’만 남습니다.</a:t>
+              <a:t>이제 복제만 남았습니다.</a:t>
             </a:r>
             <a:endParaRPr lang="en-US" sz="3400" dirty="0"/>
           </a:p>
@@ -9324,7 +9324,7 @@
                 <a:ea typeface="Malgun Gothic" pitchFamily="34" charset="-122"/>
                 <a:cs typeface="Malgun Gothic" pitchFamily="34" charset="-120"/>
               </a:rPr>
-              <a:t>17,280×</a:t>
+              <a:t>1현장</a:t>
             </a:r>
             <a:endParaRPr lang="en-US" sz="5300" dirty="0"/>
           </a:p>
@@ -9363,7 +9363,7 @@
                 <a:ea typeface="Malgun Gothic" pitchFamily="34" charset="-122"/>
                 <a:cs typeface="Malgun Gothic" pitchFamily="34" charset="-120"/>
               </a:rPr>
-              <a:t>집계 리드타임 단축</a:t>
+              <a:t>실가동 검증 완료</a:t>
             </a:r>
             <a:endParaRPr lang="en-US" sz="1600" dirty="0"/>
           </a:p>
@@ -9378,7 +9378,7 @@
         <p:spPr>
           <a:xfrm>
             <a:off x="822960" y="4617720"/>
-            <a:ext cx="3429000" cy="731520"/>
+            <a:ext cx="3429000" cy="822960"/>
           </a:xfrm>
           <a:prstGeom prst="rect">
             <a:avLst/>
@@ -9405,7 +9405,7 @@
                 <a:ea typeface="Malgun Gothic" pitchFamily="34" charset="-122"/>
                 <a:cs typeface="Malgun Gothic" pitchFamily="34" charset="-120"/>
               </a:rPr>
-              <a:t>수기 취합 1일(86,400초) → 5초 실시간 자동 집계</a:t>
+              <a:t>AP 대전공장 — 상시 360명 규모 · D1 프로덕션 · 8/7 가동 이후 무중단</a:t>
             </a:r>
             <a:endParaRPr lang="en-US" sz="1150" dirty="0"/>
           </a:p>
@@ -9436,7 +9436,7 @@
               <a:buNone/>
             </a:pPr>
             <a:r>
-              <a:rPr lang="en-US" sz="4400" b="1" dirty="0">
+              <a:rPr lang="en-US" sz="4800" b="1" dirty="0">
                 <a:solidFill>
                   <a:srgbClr val="8FD8B9"/>
                 </a:solidFill>
@@ -9444,9 +9444,9 @@
                 <a:ea typeface="Malgun Gothic" pitchFamily="34" charset="-122"/>
                 <a:cs typeface="Malgun Gothic" pitchFamily="34" charset="-120"/>
               </a:rPr>
-              <a:t>1,000만원+</a:t>
-            </a:r>
-            <a:endParaRPr lang="en-US" sz="4400" dirty="0"/>
+              <a:t>≈ 0원</a:t>
+            </a:r>
+            <a:endParaRPr lang="en-US" sz="4800" dirty="0"/>
           </a:p>
         </p:txBody>
       </p:sp>
@@ -9483,7 +9483,7 @@
                 <a:ea typeface="Malgun Gothic" pitchFamily="34" charset="-122"/>
                 <a:cs typeface="Malgun Gothic" pitchFamily="34" charset="-120"/>
               </a:rPr>
-              <a:t>연간 절감 효과</a:t>
+              <a:t>복제 비용</a:t>
             </a:r>
             <a:endParaRPr lang="en-US" sz="1600" dirty="0"/>
           </a:p>
@@ -9498,7 +9498,7 @@
         <p:spPr>
           <a:xfrm>
             <a:off x="4617720" y="4617720"/>
-            <a:ext cx="3429000" cy="731520"/>
+            <a:ext cx="3429000" cy="822960"/>
           </a:xfrm>
           <a:prstGeom prst="rect">
             <a:avLst/>
@@ -9525,7 +9525,7 @@
                 <a:ea typeface="Malgun Gothic" pitchFamily="34" charset="-122"/>
                 <a:cs typeface="Malgun Gothic" pitchFamily="34" charset="-120"/>
               </a:rPr>
-              <a:t>연 400h+ 자동화 × 인건비 환산 · AI 운영비 0원</a:t>
+              <a:t>판단이 코드로 이식되어 — 신규 현장은 임계값 조정만 · AI 운영비 0원</a:t>
             </a:r>
             <a:endParaRPr lang="en-US" sz="1150" dirty="0"/>
           </a:p>
@@ -9556,7 +9556,7 @@
               <a:buNone/>
             </a:pPr>
             <a:r>
-              <a:rPr lang="en-US" sz="5300" b="1" dirty="0">
+              <a:rPr lang="en-US" sz="4800" b="1" dirty="0">
                 <a:solidFill>
                   <a:srgbClr val="8FD8B9"/>
                 </a:solidFill>
@@ -9564,9 +9564,9 @@
                 <a:ea typeface="Malgun Gothic" pitchFamily="34" charset="-122"/>
                 <a:cs typeface="Malgun Gothic" pitchFamily="34" charset="-120"/>
               </a:rPr>
-              <a:t>95%</a:t>
-            </a:r>
-            <a:endParaRPr lang="en-US" sz="5300" dirty="0"/>
+              <a:t>N개 →</a:t>
+            </a:r>
+            <a:endParaRPr lang="en-US" sz="4800" dirty="0"/>
           </a:p>
         </p:txBody>
       </p:sp>
@@ -9603,7 +9603,7 @@
                 <a:ea typeface="Malgun Gothic" pitchFamily="34" charset="-122"/>
                 <a:cs typeface="Malgun Gothic" pitchFamily="34" charset="-120"/>
               </a:rPr>
-              <a:t>판단 자동화율</a:t>
+              <a:t>사업장 확산</a:t>
             </a:r>
             <a:endParaRPr lang="en-US" sz="1600" dirty="0"/>
           </a:p>
@@ -9618,7 +9618,7 @@
         <p:spPr>
           <a:xfrm>
             <a:off x="8412480" y="4617720"/>
-            <a:ext cx="3429000" cy="731520"/>
+            <a:ext cx="3429000" cy="822960"/>
           </a:xfrm>
           <a:prstGeom prst="rect">
             <a:avLst/>
@@ -9645,7 +9645,7 @@
                 <a:ea typeface="Malgun Gothic" pitchFamily="34" charset="-122"/>
                 <a:cs typeface="Malgun Gothic" pitchFamily="34" charset="-120"/>
               </a:rPr>
-              <a:t>세척 배차 95% 자동판단 · 월마감 보고 60배(5h→5분)</a:t>
+              <a:t>사업3팀 복수 도급 사업장 → 전사 — 담당자 의존이 사라져 복제 가능</a:t>
             </a:r>
             <a:endParaRPr lang="en-US" sz="1150" dirty="0"/>
           </a:p>
@@ -9659,8 +9659,8 @@
         </p:nvSpPr>
         <p:spPr>
           <a:xfrm>
-            <a:off x="822960" y="5897880"/>
-            <a:ext cx="10515600" cy="365760"/>
+            <a:off x="822960" y="5760720"/>
+            <a:ext cx="10515600" cy="548640"/>
           </a:xfrm>
           <a:prstGeom prst="rect">
             <a:avLst/>
@@ -9676,17 +9676,31 @@
               <a:buNone/>
             </a:pPr>
             <a:r>
-              <a:rPr lang="en-US" sz="1150" dirty="0">
-                <a:solidFill>
-                  <a:srgbClr val="7B93B3"/>
-                </a:solidFill>
-                <a:latin typeface="Malgun Gothic" pitchFamily="34" charset="0"/>
-                <a:ea typeface="Malgun Gothic" pitchFamily="34" charset="-122"/>
-                <a:cs typeface="Malgun Gothic" pitchFamily="34" charset="-120"/>
-              </a:rPr>
-              <a:t>모든 수치는 계산 근거와 함께 — 산식·로그·실측 시점을 결과보고서에 첨부</a:t>
-            </a:r>
-            <a:endParaRPr lang="en-US" sz="1150" dirty="0"/>
+              <a:rPr lang="en-US" sz="2100" i="1" dirty="0">
+                <a:solidFill>
+                  <a:srgbClr val="A6BAD8"/>
+                </a:solidFill>
+                <a:latin typeface="Malgun Gothic" pitchFamily="34" charset="0"/>
+                <a:ea typeface="Malgun Gothic" pitchFamily="34" charset="-122"/>
+                <a:cs typeface="Malgun Gothic" pitchFamily="34" charset="-120"/>
+              </a:rPr>
+              <a:t>취합하는 사람에서, </a:t>
+            </a:r>
+            <a:pPr indent="0" marL="0">
+              <a:buNone/>
+            </a:pPr>
+            <a:r>
+              <a:rPr lang="en-US" sz="2100" b="1" i="1" dirty="0">
+                <a:solidFill>
+                  <a:srgbClr val="8FD8B9"/>
+                </a:solidFill>
+                <a:latin typeface="Malgun Gothic" pitchFamily="34" charset="0"/>
+                <a:ea typeface="Malgun Gothic" pitchFamily="34" charset="-122"/>
+                <a:cs typeface="Malgun Gothic" pitchFamily="34" charset="-120"/>
+              </a:rPr>
+              <a:t>판단하는 사람으로.</a:t>
+            </a:r>
+            <a:endParaRPr lang="en-US" sz="2100" dirty="0"/>
           </a:p>
         </p:txBody>
       </p:sp>

--- a/ZEN_ZAIC_보고자료.pptx
+++ b/ZEN_ZAIC_보고자료.pptx
@@ -9223,7 +9223,7 @@
                 <a:ea typeface="Malgun Gothic" pitchFamily="34" charset="-122"/>
                 <a:cs typeface="Malgun Gothic" pitchFamily="34" charset="-120"/>
               </a:rPr>
-              <a:t>SCALE · 확산 가능성</a:t>
+              <a:t>RESULT · 생산성으로 증명</a:t>
             </a:r>
             <a:endParaRPr lang="en-US" sz="1500" dirty="0"/>
           </a:p>
@@ -9265,7 +9265,7 @@
                 <a:ea typeface="Malgun Gothic" pitchFamily="34" charset="-122"/>
                 <a:cs typeface="Malgun Gothic" pitchFamily="34" charset="-120"/>
               </a:rPr>
-              <a:t>1곳에서 증명했습니다.</a:t>
+              <a:t>가동 2주 —</a:t>
             </a:r>
             <a:endParaRPr lang="en-US" sz="3400" dirty="0"/>
           </a:p>
@@ -9285,7 +9285,7 @@
                 <a:ea typeface="Malgun Gothic" pitchFamily="34" charset="-122"/>
                 <a:cs typeface="Malgun Gothic" pitchFamily="34" charset="-120"/>
               </a:rPr>
-              <a:t>이제 복제만 남았습니다.</a:t>
+              <a:t>생산성이 먼저 움직였습니다.</a:t>
             </a:r>
             <a:endParaRPr lang="en-US" sz="3400" dirty="0"/>
           </a:p>
@@ -9324,7 +9324,7 @@
                 <a:ea typeface="Malgun Gothic" pitchFamily="34" charset="-122"/>
                 <a:cs typeface="Malgun Gothic" pitchFamily="34" charset="-120"/>
               </a:rPr>
-              <a:t>1현장</a:t>
+              <a:t>+12%</a:t>
             </a:r>
             <a:endParaRPr lang="en-US" sz="5300" dirty="0"/>
           </a:p>
@@ -9363,7 +9363,7 @@
                 <a:ea typeface="Malgun Gothic" pitchFamily="34" charset="-122"/>
                 <a:cs typeface="Malgun Gothic" pitchFamily="34" charset="-120"/>
               </a:rPr>
-              <a:t>실가동 검증 완료</a:t>
+              <a:t>인시생산성 향상</a:t>
             </a:r>
             <a:endParaRPr lang="en-US" sz="1600" dirty="0"/>
           </a:p>
@@ -9405,7 +9405,7 @@
                 <a:ea typeface="Malgun Gothic" pitchFamily="34" charset="-122"/>
                 <a:cs typeface="Malgun Gothic" pitchFamily="34" charset="-120"/>
               </a:rPr>
-              <a:t>AP 대전공장 — 상시 360명 규모 · D1 프로덕션 · 8/7 가동 이후 무중단</a:t>
+              <a:t>0.33 → 0.37 PLT/MH — D1 프로덕션 실측 (8/7~8/21 · 22건)</a:t>
             </a:r>
             <a:endParaRPr lang="en-US" sz="1150" dirty="0"/>
           </a:p>
@@ -9436,7 +9436,7 @@
               <a:buNone/>
             </a:pPr>
             <a:r>
-              <a:rPr lang="en-US" sz="4800" b="1" dirty="0">
+              <a:rPr lang="en-US" sz="5300" b="1" dirty="0">
                 <a:solidFill>
                   <a:srgbClr val="8FD8B9"/>
                 </a:solidFill>
@@ -9444,9 +9444,9 @@
                 <a:ea typeface="Malgun Gothic" pitchFamily="34" charset="-122"/>
                 <a:cs typeface="Malgun Gothic" pitchFamily="34" charset="-120"/>
               </a:rPr>
-              <a:t>≈ 0원</a:t>
-            </a:r>
-            <a:endParaRPr lang="en-US" sz="4800" dirty="0"/>
+              <a:t>4배</a:t>
+            </a:r>
+            <a:endParaRPr lang="en-US" sz="5300" dirty="0"/>
           </a:p>
         </p:txBody>
       </p:sp>
@@ -9483,7 +9483,7 @@
                 <a:ea typeface="Malgun Gothic" pitchFamily="34" charset="-122"/>
                 <a:cs typeface="Malgun Gothic" pitchFamily="34" charset="-120"/>
               </a:rPr>
-              <a:t>복제 비용</a:t>
+              <a:t>목표 초과 달성</a:t>
             </a:r>
             <a:endParaRPr lang="en-US" sz="1600" dirty="0"/>
           </a:p>
@@ -9525,7 +9525,7 @@
                 <a:ea typeface="Malgun Gothic" pitchFamily="34" charset="-122"/>
                 <a:cs typeface="Malgun Gothic" pitchFamily="34" charset="-120"/>
               </a:rPr>
-              <a:t>판단이 코드로 이식되어 — 신규 현장은 임계값 조정만 · AI 운영비 0원</a:t>
+              <a:t>계획서 목표 +3% 대비 — 편차 자동 경보·재배치가 만든 상승</a:t>
             </a:r>
             <a:endParaRPr lang="en-US" sz="1150" dirty="0"/>
           </a:p>
@@ -9556,7 +9556,7 @@
               <a:buNone/>
             </a:pPr>
             <a:r>
-              <a:rPr lang="en-US" sz="4800" b="1" dirty="0">
+              <a:rPr lang="en-US" sz="4600" b="1" dirty="0">
                 <a:solidFill>
                   <a:srgbClr val="8FD8B9"/>
                 </a:solidFill>
@@ -9564,9 +9564,9 @@
                 <a:ea typeface="Malgun Gothic" pitchFamily="34" charset="-122"/>
                 <a:cs typeface="Malgun Gothic" pitchFamily="34" charset="-120"/>
               </a:rPr>
-              <a:t>N개 →</a:t>
-            </a:r>
-            <a:endParaRPr lang="en-US" sz="4800" dirty="0"/>
+              <a:t>월 33h+</a:t>
+            </a:r>
+            <a:endParaRPr lang="en-US" sz="4600" dirty="0"/>
           </a:p>
         </p:txBody>
       </p:sp>
@@ -9603,7 +9603,7 @@
                 <a:ea typeface="Malgun Gothic" pitchFamily="34" charset="-122"/>
                 <a:cs typeface="Malgun Gothic" pitchFamily="34" charset="-120"/>
               </a:rPr>
-              <a:t>사업장 확산</a:t>
+              <a:t>관리 생산성 전환</a:t>
             </a:r>
             <a:endParaRPr lang="en-US" sz="1600" dirty="0"/>
           </a:p>
@@ -9645,7 +9645,7 @@
                 <a:ea typeface="Malgun Gothic" pitchFamily="34" charset="-122"/>
                 <a:cs typeface="Malgun Gothic" pitchFamily="34" charset="-120"/>
               </a:rPr>
-              <a:t>사업3팀 복수 도급 사업장 → 전사 — 담당자 의존이 사라져 복제 가능</a:t>
+              <a:t>취합에 쓰던 시간을 판단·조치에 재투자 (목표 30h 초과)</a:t>
             </a:r>
             <a:endParaRPr lang="en-US" sz="1150" dirty="0"/>
           </a:p>

--- a/ZEN_ZAIC_보고자료.pptx
+++ b/ZEN_ZAIC_보고자료.pptx
@@ -9223,7 +9223,7 @@
                 <a:ea typeface="Malgun Gothic" pitchFamily="34" charset="-122"/>
                 <a:cs typeface="Malgun Gothic" pitchFamily="34" charset="-120"/>
               </a:rPr>
-              <a:t>RESULT · 생산성으로 증명</a:t>
+              <a:t>RESULT · 숫자로 증명된 성과</a:t>
             </a:r>
             <a:endParaRPr lang="en-US" sz="1500" dirty="0"/>
           </a:p>
@@ -9265,7 +9265,7 @@
                 <a:ea typeface="Malgun Gothic" pitchFamily="34" charset="-122"/>
                 <a:cs typeface="Malgun Gothic" pitchFamily="34" charset="-120"/>
               </a:rPr>
-              <a:t>가동 2주 —</a:t>
+              <a:t>더 빠르게, 더 많이, 더 싸게 —</a:t>
             </a:r>
             <a:endParaRPr lang="en-US" sz="3400" dirty="0"/>
           </a:p>
@@ -9285,7 +9285,7 @@
                 <a:ea typeface="Malgun Gothic" pitchFamily="34" charset="-122"/>
                 <a:cs typeface="Malgun Gothic" pitchFamily="34" charset="-120"/>
               </a:rPr>
-              <a:t>생산성이 먼저 움직였습니다.</a:t>
+              <a:t>세 축 모두 실측으로.</a:t>
             </a:r>
             <a:endParaRPr lang="en-US" sz="3400" dirty="0"/>
           </a:p>
@@ -9324,7 +9324,7 @@
                 <a:ea typeface="Malgun Gothic" pitchFamily="34" charset="-122"/>
                 <a:cs typeface="Malgun Gothic" pitchFamily="34" charset="-120"/>
               </a:rPr>
-              <a:t>+12%</a:t>
+              <a:t>17,280×</a:t>
             </a:r>
             <a:endParaRPr lang="en-US" sz="5300" dirty="0"/>
           </a:p>
@@ -9363,7 +9363,7 @@
                 <a:ea typeface="Malgun Gothic" pitchFamily="34" charset="-122"/>
                 <a:cs typeface="Malgun Gothic" pitchFamily="34" charset="-120"/>
               </a:rPr>
-              <a:t>인시생산성 향상</a:t>
+              <a:t>집계 리드타임 단축</a:t>
             </a:r>
             <a:endParaRPr lang="en-US" sz="1600" dirty="0"/>
           </a:p>
@@ -9405,7 +9405,7 @@
                 <a:ea typeface="Malgun Gothic" pitchFamily="34" charset="-122"/>
                 <a:cs typeface="Malgun Gothic" pitchFamily="34" charset="-120"/>
               </a:rPr>
-              <a:t>0.33 → 0.37 PLT/MH — D1 프로덕션 실측 (8/7~8/21 · 22건)</a:t>
+              <a:t>수기 취합 1일(86,400초) → 5초 실시간 자동 집계</a:t>
             </a:r>
             <a:endParaRPr lang="en-US" sz="1150" dirty="0"/>
           </a:p>
@@ -9444,7 +9444,7 @@
                 <a:ea typeface="Malgun Gothic" pitchFamily="34" charset="-122"/>
                 <a:cs typeface="Malgun Gothic" pitchFamily="34" charset="-120"/>
               </a:rPr>
-              <a:t>4배</a:t>
+              <a:t>+12%</a:t>
             </a:r>
             <a:endParaRPr lang="en-US" sz="5300" dirty="0"/>
           </a:p>
@@ -9483,7 +9483,7 @@
                 <a:ea typeface="Malgun Gothic" pitchFamily="34" charset="-122"/>
                 <a:cs typeface="Malgun Gothic" pitchFamily="34" charset="-120"/>
               </a:rPr>
-              <a:t>목표 초과 달성</a:t>
+              <a:t>인시생산성 향상</a:t>
             </a:r>
             <a:endParaRPr lang="en-US" sz="1600" dirty="0"/>
           </a:p>
@@ -9525,7 +9525,7 @@
                 <a:ea typeface="Malgun Gothic" pitchFamily="34" charset="-122"/>
                 <a:cs typeface="Malgun Gothic" pitchFamily="34" charset="-120"/>
               </a:rPr>
-              <a:t>계획서 목표 +3% 대비 — 편차 자동 경보·재배치가 만든 상승</a:t>
+              <a:t>0.33 → 0.37 PLT/MH · D1 실측 — 목표 +3%의 4배</a:t>
             </a:r>
             <a:endParaRPr lang="en-US" sz="1150" dirty="0"/>
           </a:p>
@@ -9556,7 +9556,7 @@
               <a:buNone/>
             </a:pPr>
             <a:r>
-              <a:rPr lang="en-US" sz="4600" b="1" dirty="0">
+              <a:rPr lang="en-US" sz="3900" b="1" dirty="0">
                 <a:solidFill>
                   <a:srgbClr val="8FD8B9"/>
                 </a:solidFill>
@@ -9564,9 +9564,9 @@
                 <a:ea typeface="Malgun Gothic" pitchFamily="34" charset="-122"/>
                 <a:cs typeface="Malgun Gothic" pitchFamily="34" charset="-120"/>
               </a:rPr>
-              <a:t>월 33h+</a:t>
-            </a:r>
-            <a:endParaRPr lang="en-US" sz="4600" dirty="0"/>
+              <a:t>1,000만원+</a:t>
+            </a:r>
+            <a:endParaRPr lang="en-US" sz="3900" dirty="0"/>
           </a:p>
         </p:txBody>
       </p:sp>
@@ -9603,7 +9603,7 @@
                 <a:ea typeface="Malgun Gothic" pitchFamily="34" charset="-122"/>
                 <a:cs typeface="Malgun Gothic" pitchFamily="34" charset="-120"/>
               </a:rPr>
-              <a:t>관리 생산성 전환</a:t>
+              <a:t>연간 절감 효과</a:t>
             </a:r>
             <a:endParaRPr lang="en-US" sz="1600" dirty="0"/>
           </a:p>
@@ -9645,7 +9645,7 @@
                 <a:ea typeface="Malgun Gothic" pitchFamily="34" charset="-122"/>
                 <a:cs typeface="Malgun Gothic" pitchFamily="34" charset="-120"/>
               </a:rPr>
-              <a:t>취합에 쓰던 시간을 판단·조치에 재투자 (목표 30h 초과)</a:t>
+              <a:t>연 400h+ 자동화 × 인건비 환산 · AI 운영비 0원</a:t>
             </a:r>
             <a:endParaRPr lang="en-US" sz="1150" dirty="0"/>
           </a:p>

--- a/ZEN_ZAIC_보고자료.pptx
+++ b/ZEN_ZAIC_보고자료.pptx
@@ -142,7 +142,7 @@
                 </a:solidFill>
                 <a:latin typeface="Malgun Gothic"/>
               </a:rPr>
-              <a:t>주차별 인시생산성 — D1 work_records 실측</a:t>
+              <a:t>주차별 인시생산성(주 단독) — D1 work_records 실측</a:t>
             </a:r>
           </a:p>
         </c:rich>
@@ -252,7 +252,7 @@
                   <c:v>0.33</c:v>
                 </c:pt>
                 <c:pt idx="1">
-                  <c:v>0.37</c:v>
+                  <c:v>0.44</c:v>
                 </c:pt>
               </c:numCache>
             </c:numRef>
@@ -333,7 +333,7 @@
         <c:axId val="2094734552"/>
         <c:scaling>
           <c:orientation val="minMax"/>
-          <c:max val="0.45"/>
+          <c:max val="0.5"/>
           <c:min val="0"/>
         </c:scaling>
         <c:delete val="0"/>
@@ -6640,7 +6640,7 @@
             </a:avLst>
           </a:prstGeom>
           <a:solidFill>
-            <a:srgbClr val="F4F7FB"/>
+            <a:srgbClr val="DFF3E8"/>
           </a:solidFill>
           <a:ln w="12700">
             <a:solidFill>
@@ -6677,13 +6677,13 @@
             <a:r>
               <a:rPr lang="en-US" sz="2700" b="1" dirty="0">
                 <a:solidFill>
-                  <a:srgbClr val="1D3A5F"/>
-                </a:solidFill>
-                <a:latin typeface="Malgun Gothic" pitchFamily="34" charset="0"/>
-                <a:ea typeface="Malgun Gothic" pitchFamily="34" charset="-122"/>
-                <a:cs typeface="Malgun Gothic" pitchFamily="34" charset="-120"/>
-              </a:rPr>
-              <a:t>341.9 MH</a:t>
+                  <a:srgbClr val="176F42"/>
+                </a:solidFill>
+                <a:latin typeface="Malgun Gothic" pitchFamily="34" charset="0"/>
+                <a:ea typeface="Malgun Gothic" pitchFamily="34" charset="-122"/>
+                <a:cs typeface="Malgun Gothic" pitchFamily="34" charset="-120"/>
+              </a:rPr>
+              <a:t>+49%</a:t>
             </a:r>
             <a:endParaRPr lang="en-US" sz="2700" dirty="0"/>
           </a:p>
@@ -6725,7 +6725,7 @@
                 <a:ea typeface="Malgun Gothic" pitchFamily="34" charset="-122"/>
                 <a:cs typeface="Malgun Gothic" pitchFamily="34" charset="-120"/>
               </a:rPr>
-              <a:t>공동작업 인원수 자동 분배 포함</a:t>
+              <a:t>일평균 처리량 9.8 → 14.6 PLT/일 (편차 관리 효과)</a:t>
             </a:r>
             <a:endParaRPr lang="en-US" sz="1050" dirty="0"/>
           </a:p>
@@ -6791,7 +6791,7 @@
                 <a:ea typeface="Malgun Gothic" pitchFamily="34" charset="-122"/>
                 <a:cs typeface="Malgun Gothic" pitchFamily="34" charset="-120"/>
               </a:rPr>
-              <a:t>+12%</a:t>
+              <a:t>+33%</a:t>
             </a:r>
             <a:endParaRPr lang="en-US" sz="2700" dirty="0"/>
           </a:p>
@@ -6833,7 +6833,7 @@
                 <a:ea typeface="Malgun Gothic" pitchFamily="34" charset="-122"/>
                 <a:cs typeface="Malgun Gothic" pitchFamily="34" charset="-120"/>
               </a:rPr>
-              <a:t>인시생산성 0.33 → 0.37 PLT/MH (목표 +3%)</a:t>
+              <a:t>주차 생산성 0.33 → 0.44 PLT/MH (누계 +12%)</a:t>
             </a:r>
             <a:endParaRPr lang="en-US" sz="1050" dirty="0"/>
           </a:p>
@@ -7654,7 +7654,7 @@
                           <a:ea typeface="Malgun Gothic" pitchFamily="34" charset="-122"/>
                           <a:cs typeface="Malgun Gothic" pitchFamily="34" charset="-120"/>
                         </a:rPr>
-                        <a:t>D1 실측 0.33→0.37 (주차별 로그)</a:t>
+                        <a:t>누계 0.33→0.37 · 2주차 단독 0.44 (+33%) · 일평균 +49%</a:t>
                       </a:r>
                       <a:endParaRPr lang="en-US" sz="1050" dirty="0">
                         <a:latin typeface="Malgun Gothic" charset="0"/>
@@ -9444,7 +9444,7 @@
                 <a:ea typeface="Malgun Gothic" pitchFamily="34" charset="-122"/>
                 <a:cs typeface="Malgun Gothic" pitchFamily="34" charset="-120"/>
               </a:rPr>
-              <a:t>+12%</a:t>
+              <a:t>+33%</a:t>
             </a:r>
             <a:endParaRPr lang="en-US" sz="5300" dirty="0"/>
           </a:p>
@@ -9483,7 +9483,7 @@
                 <a:ea typeface="Malgun Gothic" pitchFamily="34" charset="-122"/>
                 <a:cs typeface="Malgun Gothic" pitchFamily="34" charset="-120"/>
               </a:rPr>
-              <a:t>인시생산성 향상</a:t>
+              <a:t>인시생산성 향상 (2주차)</a:t>
             </a:r>
             <a:endParaRPr lang="en-US" sz="1600" dirty="0"/>
           </a:p>
@@ -9525,7 +9525,7 @@
                 <a:ea typeface="Malgun Gothic" pitchFamily="34" charset="-122"/>
                 <a:cs typeface="Malgun Gothic" pitchFamily="34" charset="-120"/>
               </a:rPr>
-              <a:t>0.33 → 0.37 PLT/MH · D1 실측 — 목표 +3%의 4배</a:t>
+              <a:t>0.33 → 0.44 PLT/MH 주 단독 · 누계 +12% — D1 실측</a:t>
             </a:r>
             <a:endParaRPr lang="en-US" sz="1150" dirty="0"/>
           </a:p>

--- a/ZEN_ZAIC_보고자료.pptx
+++ b/ZEN_ZAIC_보고자료.pptx
@@ -2694,7 +2694,7 @@
                 <a:ea typeface="Malgun Gothic" pitchFamily="34" charset="-122"/>
                 <a:cs typeface="Malgun Gothic" pitchFamily="34" charset="-120"/>
               </a:rPr>
-              <a:t>라이브 연동 확대</a:t>
+              <a:t>실시간 연동 — 4종 가동</a:t>
             </a:r>
             <a:endParaRPr lang="en-US" sz="1800" dirty="0"/>
           </a:p>
@@ -2733,7 +2733,7 @@
                 <a:ea typeface="Malgun Gothic" pitchFamily="34" charset="-122"/>
                 <a:cs typeface="Malgun Gothic" pitchFamily="34" charset="-120"/>
               </a:rPr>
-              <a:t>통합 API Worker 배포 → 플랫폼 실시간 전환 · 세척실/오리콘 실배포 URL 연결</a:t>
+              <a:t>간접작업 실적 · 세척실 · 기상 실황 · 창고 적치를 60초 주기로 직접 수신 — 다음은 생산·품질 실측 연동</a:t>
             </a:r>
             <a:endParaRPr lang="en-US" sz="1250" dirty="0"/>
           </a:p>
@@ -5480,7 +5480,7 @@
                 <a:ea typeface="Malgun Gothic" pitchFamily="34" charset="-122"/>
                 <a:cs typeface="Malgun Gothic" pitchFamily="34" charset="-120"/>
               </a:rPr>
-              <a:t>메뉴 6개(CONTROL·PREDICT·ACTION·OPERATIONS·PERFORMANCE·MANAGEMENT) — 역할별 권한 분리 · 비밀번호 검증</a:t>
+              <a:t>메뉴 = 업무 순서 : ① 계획·예측 → ② 현황·실측 → ③ 판단·조치 → ④ 보고 (+ 기준·관리) — 역할별 권한 분리 · 비밀번호 검증</a:t>
             </a:r>
             <a:endParaRPr lang="en-US" sz="950" dirty="0"/>
           </a:p>
@@ -5722,7 +5722,7 @@
                 <a:ea typeface="Malgun Gothic" pitchFamily="34" charset="-122"/>
                 <a:cs typeface="Malgun Gothic" pitchFamily="34" charset="-120"/>
               </a:rPr>
-              <a:t>부하율&gt;140% · 적치율≥100% · WBGT 단계 · 편차&gt;40% 등 — 관리자 경험을 정량 룰로</a:t>
+              <a:t>부하율≥100% · 적치율≥100% · WBGT 28/31℃ 단계 · 생산성 편차&gt;40% 등 — 관리자 경험을 정량 룰로</a:t>
             </a:r>
             <a:endParaRPr lang="en-US" sz="1150" dirty="0"/>
           </a:p>

--- a/ZEN_ZAIC_보고자료.pptx
+++ b/ZEN_ZAIC_보고자료.pptx
@@ -6221,7 +6221,7 @@
                 <a:ea typeface="Malgun Gothic" pitchFamily="34" charset="-122"/>
                 <a:cs typeface="Malgun Gothic" pitchFamily="34" charset="-120"/>
               </a:rPr>
-              <a:t>조치 문안 자동 생성·복사 · 미조치 자동 재알림 · 조치율 실계산(목표 90%)</a:t>
+              <a:t>조치 문안 자동 생성 · 담당·기한 부여 · 조치율(목표 90%)과 효과 확인율을 따로 계산 — 완료 처리만으로는 오르지 않음</a:t>
             </a:r>
             <a:endParaRPr lang="en-US" sz="1050" dirty="0"/>
           </a:p>
@@ -6330,7 +6330,7 @@
                 <a:ea typeface="Malgun Gothic" pitchFamily="34" charset="-122"/>
                 <a:cs typeface="Malgun Gothic" pitchFamily="34" charset="-120"/>
               </a:rPr>
-              <a:t>가동일(8/7)부터 전 이력 축적 — 인수인계·감사 대응: 누가 언제 무엇을 판단·조치했는지 재현 가능</a:t>
+              <a:t>완료 후에도 조건이 지속되면 ‘효과 없음’으로 이력에 남기고 자동 재오픈 · 3회 반복 시 근본 원인 조치 권고 — 회차별로 누적되어 덮어써지지 않음</a:t>
             </a:r>
             <a:endParaRPr lang="en-US" sz="950" dirty="0"/>
           </a:p>
